--- a/2026_М_ПІ_ІПЗ-м-24-1_Савін_О_В.pptx
+++ b/2026_М_ПІ_ІПЗ-м-24-1_Савін_О_В.pptx
@@ -124,7 +124,7 @@
 <file path=ppt/charts/chart1.xml><?xml version="1.0" encoding="utf-8"?>
 <c:chartSpace xmlns:c="http://schemas.openxmlformats.org/drawingml/2006/chart" xmlns:a="http://schemas.openxmlformats.org/drawingml/2006/main" xmlns:r="http://schemas.openxmlformats.org/officeDocument/2006/relationships" xmlns:c16r2="http://schemas.microsoft.com/office/drawing/2015/06/chart">
   <c:date1904 val="0"/>
-  <c:lang val="ru-RU"/>
+  <c:lang val="en-GB"/>
   <c:roundedCorners val="1"/>
   <c:style val="2"/>
   <c:chart>
@@ -407,7 +407,6 @@
     </c:plotArea>
     <c:legend>
       <c:legendPos val="b"/>
-      <c:layout/>
       <c:overlay val="0"/>
     </c:legend>
     <c:plotVisOnly val="1"/>
@@ -4652,7 +4651,7 @@
         <p:spPr>
           <a:xfrm>
             <a:off x="2880360" y="868680"/>
-            <a:ext cx="5303520" cy="1600200"/>
+            <a:ext cx="5303520" cy="2451184"/>
           </a:xfrm>
           <a:prstGeom prst="rect">
             <a:avLst/>
@@ -4671,14 +4670,38 @@
               </a:lnSpc>
             </a:pPr>
             <a:r>
-              <a:rPr sz="2500" b="0">
-                <a:solidFill>
-                  <a:srgbClr val="000000"/>
-                </a:solidFill>
-                <a:latin typeface="Arial"/>
-              </a:rPr>
-              <a:t>Дослідження методів</a:t>
-            </a:r>
+              <a:rPr sz="2500" b="0" dirty="0" err="1">
+                <a:solidFill>
+                  <a:srgbClr val="000000"/>
+                </a:solidFill>
+                <a:latin typeface="Arial"/>
+              </a:rPr>
+              <a:t>Дослідження</a:t>
+            </a:r>
+            <a:r>
+              <a:rPr sz="2500" b="0" dirty="0">
+                <a:solidFill>
+                  <a:srgbClr val="000000"/>
+                </a:solidFill>
+                <a:latin typeface="Arial"/>
+              </a:rPr>
+              <a:t> </a:t>
+            </a:r>
+            <a:r>
+              <a:rPr sz="2500" b="0" dirty="0" err="1">
+                <a:solidFill>
+                  <a:srgbClr val="000000"/>
+                </a:solidFill>
+                <a:latin typeface="Arial"/>
+              </a:rPr>
+              <a:t>методів</a:t>
+            </a:r>
+            <a:endParaRPr sz="2500" b="0" dirty="0">
+              <a:solidFill>
+                <a:srgbClr val="000000"/>
+              </a:solidFill>
+              <a:latin typeface="Arial"/>
+            </a:endParaRPr>
           </a:p>
           <a:p>
             <a:pPr algn="l">
@@ -4687,13 +4710,58 @@
               </a:lnSpc>
             </a:pPr>
             <a:r>
-              <a:rPr sz="2500" b="0">
-                <a:solidFill>
-                  <a:srgbClr val="000000"/>
-                </a:solidFill>
-                <a:latin typeface="Arial"/>
-              </a:rPr>
-              <a:t>семантичного аналізу тексту:</a:t>
+              <a:rPr sz="2500" b="0" dirty="0" err="1">
+                <a:solidFill>
+                  <a:srgbClr val="000000"/>
+                </a:solidFill>
+                <a:latin typeface="Arial"/>
+              </a:rPr>
+              <a:t>семантичного</a:t>
+            </a:r>
+            <a:r>
+              <a:rPr sz="2500" b="0" dirty="0">
+                <a:solidFill>
+                  <a:srgbClr val="000000"/>
+                </a:solidFill>
+                <a:latin typeface="Arial"/>
+              </a:rPr>
+              <a:t> </a:t>
+            </a:r>
+            <a:r>
+              <a:rPr sz="2500" b="0" dirty="0" err="1">
+                <a:solidFill>
+                  <a:srgbClr val="000000"/>
+                </a:solidFill>
+                <a:latin typeface="Arial"/>
+              </a:rPr>
+              <a:t>аналізу</a:t>
+            </a:r>
+            <a:r>
+              <a:rPr sz="2500" b="0" dirty="0">
+                <a:solidFill>
+                  <a:srgbClr val="000000"/>
+                </a:solidFill>
+                <a:latin typeface="Arial"/>
+              </a:rPr>
+              <a:t> </a:t>
+            </a:r>
+            <a:r>
+              <a:rPr sz="2500" b="0" dirty="0" err="1">
+                <a:solidFill>
+                  <a:srgbClr val="000000"/>
+                </a:solidFill>
+                <a:latin typeface="Arial"/>
+              </a:rPr>
+              <a:t>тексту</a:t>
+            </a:r>
+            <a:r>
+              <a:rPr sz="2500" b="0" dirty="0">
+                <a:solidFill>
+                  <a:srgbClr val="000000"/>
+                </a:solidFill>
+                <a:latin typeface="Arial"/>
+              </a:rPr>
+              <a:t>:</a:t>
             </a:r>
           </a:p>
           <a:p>
@@ -4703,14 +4771,56 @@
               </a:lnSpc>
             </a:pPr>
             <a:r>
-              <a:rPr sz="2500" b="0">
-                <a:solidFill>
-                  <a:srgbClr val="000000"/>
-                </a:solidFill>
-                <a:latin typeface="Arial"/>
-              </a:rPr>
-              <a:t>порівняльний аналіз моделей</a:t>
-            </a:r>
+              <a:rPr sz="2500" b="0" dirty="0" err="1">
+                <a:solidFill>
+                  <a:srgbClr val="000000"/>
+                </a:solidFill>
+                <a:latin typeface="Arial"/>
+              </a:rPr>
+              <a:t>порівняльний</a:t>
+            </a:r>
+            <a:r>
+              <a:rPr sz="2500" b="0" dirty="0">
+                <a:solidFill>
+                  <a:srgbClr val="000000"/>
+                </a:solidFill>
+                <a:latin typeface="Arial"/>
+              </a:rPr>
+              <a:t> </a:t>
+            </a:r>
+            <a:r>
+              <a:rPr sz="2500" b="0" dirty="0" err="1">
+                <a:solidFill>
+                  <a:srgbClr val="000000"/>
+                </a:solidFill>
+                <a:latin typeface="Arial"/>
+              </a:rPr>
+              <a:t>аналіз</a:t>
+            </a:r>
+            <a:r>
+              <a:rPr sz="2500" b="0" dirty="0">
+                <a:solidFill>
+                  <a:srgbClr val="000000"/>
+                </a:solidFill>
+                <a:latin typeface="Arial"/>
+              </a:rPr>
+              <a:t> </a:t>
+            </a:r>
+            <a:r>
+              <a:rPr sz="2500" b="0" dirty="0" err="1">
+                <a:solidFill>
+                  <a:srgbClr val="000000"/>
+                </a:solidFill>
+                <a:latin typeface="Arial"/>
+              </a:rPr>
+              <a:t>моделей</a:t>
+            </a:r>
+            <a:endParaRPr sz="2500" b="0" dirty="0">
+              <a:solidFill>
+                <a:srgbClr val="000000"/>
+              </a:solidFill>
+              <a:latin typeface="Arial"/>
+            </a:endParaRPr>
           </a:p>
           <a:p>
             <a:pPr algn="l">
@@ -4719,14 +4829,56 @@
               </a:lnSpc>
             </a:pPr>
             <a:r>
-              <a:rPr sz="2500" b="0">
-                <a:solidFill>
-                  <a:srgbClr val="000000"/>
-                </a:solidFill>
-                <a:latin typeface="Arial"/>
-              </a:rPr>
-              <a:t>LSTM та трансформерів</a:t>
-            </a:r>
+              <a:rPr sz="2500" b="0" dirty="0">
+                <a:solidFill>
+                  <a:srgbClr val="000000"/>
+                </a:solidFill>
+                <a:latin typeface="Arial"/>
+              </a:rPr>
+              <a:t>LSTM </a:t>
+            </a:r>
+            <a:r>
+              <a:rPr sz="2500" b="0" dirty="0" err="1">
+                <a:solidFill>
+                  <a:srgbClr val="000000"/>
+                </a:solidFill>
+                <a:latin typeface="Arial"/>
+              </a:rPr>
+              <a:t>та</a:t>
+            </a:r>
+            <a:r>
+              <a:rPr sz="2500" b="0" dirty="0">
+                <a:solidFill>
+                  <a:srgbClr val="000000"/>
+                </a:solidFill>
+                <a:latin typeface="Arial"/>
+              </a:rPr>
+              <a:t> </a:t>
+            </a:r>
+            <a:r>
+              <a:rPr sz="2500" b="0" dirty="0" err="1">
+                <a:solidFill>
+                  <a:srgbClr val="000000"/>
+                </a:solidFill>
+                <a:latin typeface="Arial"/>
+              </a:rPr>
+              <a:t>трансформерів</a:t>
+            </a:r>
+            <a:r>
+              <a:rPr lang="uk-UA" sz="2500" b="0" dirty="0">
+                <a:solidFill>
+                  <a:srgbClr val="000000"/>
+                </a:solidFill>
+                <a:latin typeface="Arial"/>
+              </a:rPr>
+              <a:t> для підвищення точності класифікації текстів</a:t>
+            </a:r>
+            <a:endParaRPr sz="2500" b="0" dirty="0">
+              <a:solidFill>
+                <a:srgbClr val="000000"/>
+              </a:solidFill>
+              <a:latin typeface="Arial"/>
+            </a:endParaRPr>
           </a:p>
         </p:txBody>
       </p:sp>
@@ -4758,7 +4910,7 @@
               </a:lnSpc>
             </a:pPr>
             <a:r>
-              <a:rPr lang="uk-UA" sz="1800" b="0" noProof="1" smtClean="0">
+              <a:rPr lang="uk-UA" sz="1800" b="0" noProof="1">
                 <a:solidFill>
                   <a:srgbClr val="000000"/>
                 </a:solidFill>
@@ -4774,7 +4926,7 @@
               </a:lnSpc>
             </a:pPr>
             <a:r>
-              <a:rPr lang="uk-UA" sz="1800" b="0" noProof="1" smtClean="0">
+              <a:rPr lang="uk-UA" sz="1800" b="0" noProof="1">
                 <a:solidFill>
                   <a:srgbClr val="000000"/>
                 </a:solidFill>
@@ -4783,7 +4935,7 @@
               <a:t>Науковий керівник: </a:t>
             </a:r>
             <a:r>
-              <a:rPr lang="uk-UA" noProof="1" smtClean="0">
+              <a:rPr lang="uk-UA" noProof="1">
                 <a:solidFill>
                   <a:srgbClr val="000000"/>
                 </a:solidFill>
@@ -4792,7 +4944,7 @@
               <a:t>доц</a:t>
             </a:r>
             <a:r>
-              <a:rPr lang="uk-UA" sz="1800" b="0" noProof="1" smtClean="0">
+              <a:rPr lang="uk-UA" sz="1800" b="0" noProof="1">
                 <a:solidFill>
                   <a:srgbClr val="000000"/>
                 </a:solidFill>
@@ -4808,16 +4960,12 @@
               </a:lnSpc>
             </a:pPr>
             <a:r>
-              <a:rPr lang="uk-UA" smtClean="0"/>
+              <a:rPr lang="uk-UA"/>
               <a:t>Афанасьєва </a:t>
             </a:r>
             <a:r>
               <a:rPr lang="uk-UA" dirty="0"/>
-              <a:t>І.В</a:t>
-            </a:r>
-            <a:r>
-              <a:rPr lang="uk-UA" dirty="0" smtClean="0"/>
-              <a:t>.</a:t>
+              <a:t>І.В.</a:t>
             </a:r>
           </a:p>
           <a:p>
@@ -4827,7 +4975,7 @@
               </a:lnSpc>
             </a:pPr>
             <a:r>
-              <a:rPr lang="uk-UA" sz="1800" b="0" noProof="1" smtClean="0">
+              <a:rPr lang="uk-UA" sz="1800" b="0" noProof="1">
                 <a:solidFill>
                   <a:srgbClr val="000000"/>
                 </a:solidFill>
@@ -4835,12 +4983,6 @@
               </a:rPr>
               <a:t>2026 р.</a:t>
             </a:r>
-            <a:endParaRPr lang="uk-UA" sz="1800" b="0" noProof="1">
-              <a:solidFill>
-                <a:srgbClr val="000000"/>
-              </a:solidFill>
-              <a:latin typeface="Arial"/>
-            </a:endParaRPr>
           </a:p>
         </p:txBody>
       </p:sp>
@@ -4849,14 +4991,6 @@
   <p:clrMapOvr>
     <a:masterClrMapping/>
   </p:clrMapOvr>
-  <mc:AlternateContent xmlns:mc="http://schemas.openxmlformats.org/markup-compatibility/2006" xmlns:p14="http://schemas.microsoft.com/office/powerpoint/2010/main">
-    <mc:Choice Requires="p14">
-      <p:transition spd="slow" p14:dur="2000"/>
-    </mc:Choice>
-    <mc:Fallback xmlns="" xmlns:p15="http://schemas.microsoft.com/office/powerpoint/2012/main">
-      <p:transition spd="slow"/>
-    </mc:Fallback>
-  </mc:AlternateContent>
 </p:sld>
 </file>
 
@@ -5009,7 +5143,7 @@
           </a:fontRef>
         </p:style>
         <p:txBody>
-          <a:bodyPr rtlCol="0" anchor="ctr" wrap="square" lIns="228600" rIns="164592" tIns="128016" bIns="91440"/>
+          <a:bodyPr wrap="square" lIns="228600" tIns="128016" rIns="164592" bIns="91440" rtlCol="0" anchor="ctr"/>
           <a:lstStyle/>
           <a:p>
             <a:pPr algn="ctr">
@@ -5160,7 +5294,7 @@
           <a:noFill/>
         </p:spPr>
         <p:txBody>
-          <a:bodyPr wrap="square" lIns="36576" rIns="36576" tIns="18288" bIns="18288">
+          <a:bodyPr wrap="square" lIns="36576" tIns="18288" rIns="36576" bIns="18288">
             <a:spAutoFit/>
           </a:bodyPr>
           <a:lstStyle/>
@@ -5183,14 +5317,6 @@
   <p:clrMapOvr>
     <a:masterClrMapping/>
   </p:clrMapOvr>
-  <mc:AlternateContent xmlns:mc="http://schemas.openxmlformats.org/markup-compatibility/2006" xmlns:p14="http://schemas.microsoft.com/office/powerpoint/2010/main">
-    <mc:Choice Requires="p14">
-      <p:transition spd="slow" p14:dur="2000"/>
-    </mc:Choice>
-    <mc:Fallback xmlns="" xmlns:p15="http://schemas.microsoft.com/office/powerpoint/2012/main">
-      <p:transition spd="slow"/>
-    </mc:Fallback>
-  </mc:AlternateContent>
 </p:sld>
 </file>
 
@@ -5361,7 +5487,7 @@
           <a:p>
             <a:pPr algn="ctr"/>
             <a:r>
-              <a:rPr lang="uk-UA" sz="1600" b="1" noProof="1" smtClean="0">
+              <a:rPr lang="uk-UA" sz="1600" b="1" noProof="1">
                 <a:solidFill>
                   <a:srgbClr val="005D78"/>
                 </a:solidFill>
@@ -5377,7 +5503,7 @@
               </a:lnSpc>
             </a:pPr>
             <a:r>
-              <a:rPr lang="uk-UA" sz="1400" noProof="1" smtClean="0">
+              <a:rPr lang="uk-UA" sz="1400" noProof="1">
                 <a:solidFill>
                   <a:srgbClr val="000000"/>
                 </a:solidFill>
@@ -5385,12 +5511,6 @@
               </a:rPr>
               <a:t>Семантичний аналіз потрібний для пошуку, аналітики, класифікації новин, модерації та автоматизованих рішень.</a:t>
             </a:r>
-            <a:endParaRPr lang="uk-UA" sz="1400" noProof="1">
-              <a:solidFill>
-                <a:srgbClr val="000000"/>
-              </a:solidFill>
-              <a:latin typeface="Arial"/>
-            </a:endParaRPr>
           </a:p>
         </p:txBody>
       </p:sp>
@@ -5437,7 +5557,7 @@
           <a:p>
             <a:pPr algn="ctr"/>
             <a:r>
-              <a:rPr lang="en-US" sz="1600" b="1" noProof="1" smtClean="0">
+              <a:rPr lang="en-US" sz="1600" b="1" noProof="1">
                 <a:solidFill>
                   <a:srgbClr val="005D78"/>
                 </a:solidFill>
@@ -5453,7 +5573,7 @@
               </a:lnSpc>
             </a:pPr>
             <a:r>
-              <a:rPr lang="en-US" sz="1400" noProof="1" smtClean="0">
+              <a:rPr lang="en-US" sz="1400" noProof="1">
                 <a:solidFill>
                   <a:srgbClr val="000000"/>
                 </a:solidFill>
@@ -5461,12 +5581,6 @@
               </a:rPr>
               <a:t>LSTM та трансформери дають різний баланс між якістю, швидкістю, пам’яттю та складністю навчання.</a:t>
             </a:r>
-            <a:endParaRPr lang="en-US" sz="1400" noProof="1">
-              <a:solidFill>
-                <a:srgbClr val="000000"/>
-              </a:solidFill>
-              <a:latin typeface="Arial"/>
-            </a:endParaRPr>
           </a:p>
         </p:txBody>
       </p:sp>
@@ -5513,7 +5627,7 @@
           <a:p>
             <a:pPr algn="ctr"/>
             <a:r>
-              <a:rPr lang="uk-UA" sz="1600" b="1" noProof="1" smtClean="0">
+              <a:rPr lang="uk-UA" sz="1600" b="1" noProof="1">
                 <a:solidFill>
                   <a:srgbClr val="005D78"/>
                 </a:solidFill>
@@ -5529,7 +5643,7 @@
               </a:lnSpc>
             </a:pPr>
             <a:r>
-              <a:rPr lang="uk-UA" sz="1400" noProof="1" smtClean="0">
+              <a:rPr lang="uk-UA" sz="1400" noProof="1">
                 <a:solidFill>
                   <a:srgbClr val="000000"/>
                 </a:solidFill>
@@ -5537,12 +5651,6 @@
               </a:rPr>
               <a:t>Порівняти шість моделей за єдиним протоколом і сформувати рекомендації щодо вибору архітектури.</a:t>
             </a:r>
-            <a:endParaRPr lang="uk-UA" sz="1400" noProof="1">
-              <a:solidFill>
-                <a:srgbClr val="000000"/>
-              </a:solidFill>
-              <a:latin typeface="Arial"/>
-            </a:endParaRPr>
           </a:p>
         </p:txBody>
       </p:sp>
@@ -5589,7 +5697,7 @@
           <a:p>
             <a:pPr algn="ctr"/>
             <a:r>
-              <a:rPr lang="uk-UA" sz="1300" b="1" noProof="1" smtClean="0">
+              <a:rPr lang="uk-UA" sz="1300" b="1" noProof="1">
                 <a:solidFill>
                   <a:srgbClr val="FFFFFF"/>
                 </a:solidFill>
@@ -5597,12 +5705,6 @@
               </a:rPr>
               <a:t>Об’єкт – процес семантичної класифікації тексту</a:t>
             </a:r>
-            <a:endParaRPr lang="uk-UA" sz="1300" b="1" noProof="1">
-              <a:solidFill>
-                <a:srgbClr val="FFFFFF"/>
-              </a:solidFill>
-              <a:latin typeface="Arial"/>
-            </a:endParaRPr>
           </a:p>
         </p:txBody>
       </p:sp>
@@ -5665,14 +5767,6 @@
   <p:clrMapOvr>
     <a:masterClrMapping/>
   </p:clrMapOvr>
-  <mc:AlternateContent xmlns:mc="http://schemas.openxmlformats.org/markup-compatibility/2006" xmlns:p14="http://schemas.microsoft.com/office/powerpoint/2010/main">
-    <mc:Choice Requires="p14">
-      <p:transition spd="slow" p14:dur="2000"/>
-    </mc:Choice>
-    <mc:Fallback xmlns="" xmlns:p15="http://schemas.microsoft.com/office/powerpoint/2012/main">
-      <p:transition spd="slow"/>
-    </mc:Fallback>
-  </mc:AlternateContent>
 </p:sld>
 </file>
 
@@ -5837,7 +5931,7 @@
           <a:p>
             <a:pPr algn="ctr"/>
             <a:r>
-              <a:rPr lang="uk-UA" sz="1600" b="1" noProof="1" smtClean="0">
+              <a:rPr lang="uk-UA" sz="1600" b="1" noProof="1">
                 <a:solidFill>
                   <a:srgbClr val="005D78"/>
                 </a:solidFill>
@@ -5853,7 +5947,7 @@
               </a:lnSpc>
             </a:pPr>
             <a:r>
-              <a:rPr lang="uk-UA" sz="1400" noProof="1" smtClean="0">
+              <a:rPr lang="uk-UA" sz="1400" noProof="1">
                 <a:solidFill>
                   <a:srgbClr val="000000"/>
                 </a:solidFill>
@@ -5861,12 +5955,6 @@
               </a:rPr>
               <a:t>Гейти пам’яті зберігають релевантний контекст і зменшують проблему затухання градієнта. BiLSTM враховує контекст у двох напрямах.</a:t>
             </a:r>
-            <a:endParaRPr lang="uk-UA" sz="1400" noProof="1">
-              <a:solidFill>
-                <a:srgbClr val="000000"/>
-              </a:solidFill>
-              <a:latin typeface="Arial"/>
-            </a:endParaRPr>
           </a:p>
         </p:txBody>
       </p:sp>
@@ -5913,7 +6001,7 @@
           <a:p>
             <a:pPr algn="ctr"/>
             <a:r>
-              <a:rPr lang="uk-UA" sz="1600" b="1" noProof="1" smtClean="0">
+              <a:rPr lang="uk-UA" sz="1600" b="1" noProof="1">
                 <a:solidFill>
                   <a:srgbClr val="005D78"/>
                 </a:solidFill>
@@ -5929,7 +6017,7 @@
               </a:lnSpc>
             </a:pPr>
             <a:r>
-              <a:rPr lang="uk-UA" sz="1400" noProof="1" smtClean="0">
+              <a:rPr lang="uk-UA" sz="1400" noProof="1">
                 <a:solidFill>
                   <a:srgbClr val="000000"/>
                 </a:solidFill>
@@ -5937,12 +6025,6 @@
               </a:rPr>
               <a:t>Self-attention моделює зв’язки між усіма токенами одночасно. Перевага – глобальний контекст і паралельне навчання.</a:t>
             </a:r>
-            <a:endParaRPr lang="uk-UA" sz="1400" noProof="1">
-              <a:solidFill>
-                <a:srgbClr val="000000"/>
-              </a:solidFill>
-              <a:latin typeface="Arial"/>
-            </a:endParaRPr>
           </a:p>
         </p:txBody>
       </p:sp>
@@ -5989,7 +6071,7 @@
           <a:p>
             <a:pPr algn="ctr"/>
             <a:r>
-              <a:rPr lang="uk-UA" sz="1600" b="1" noProof="1" smtClean="0">
+              <a:rPr lang="uk-UA" sz="1600" b="1" noProof="1">
                 <a:solidFill>
                   <a:srgbClr val="005D78"/>
                 </a:solidFill>
@@ -6005,7 +6087,7 @@
               </a:lnSpc>
             </a:pPr>
             <a:r>
-              <a:rPr lang="uk-UA" sz="1400" noProof="1" smtClean="0">
+              <a:rPr lang="uk-UA" sz="1400" noProof="1">
                 <a:solidFill>
                   <a:srgbClr val="000000"/>
                 </a:solidFill>
@@ -6013,12 +6095,6 @@
               </a:rPr>
               <a:t>spaCy, NLTK, Gensim, Hugging Face Transformers, AllenNLP та fastText дають готові інструменти для NLP-досліджень.</a:t>
             </a:r>
-            <a:endParaRPr lang="uk-UA" sz="1400" noProof="1">
-              <a:solidFill>
-                <a:srgbClr val="000000"/>
-              </a:solidFill>
-              <a:latin typeface="Arial"/>
-            </a:endParaRPr>
           </a:p>
         </p:txBody>
       </p:sp>
@@ -6135,7 +6211,7 @@
           <a:p>
             <a:pPr algn="ctr"/>
             <a:r>
-              <a:rPr lang="uk-UA" sz="1300" b="1" noProof="1" smtClean="0">
+              <a:rPr lang="uk-UA" sz="1300" b="1" noProof="1">
                 <a:solidFill>
                   <a:srgbClr val="FFFFFF"/>
                 </a:solidFill>
@@ -6143,12 +6219,6 @@
               </a:rPr>
               <a:t>векторизація</a:t>
             </a:r>
-            <a:endParaRPr lang="uk-UA" sz="1300" b="1" noProof="1">
-              <a:solidFill>
-                <a:srgbClr val="FFFFFF"/>
-              </a:solidFill>
-              <a:latin typeface="Arial"/>
-            </a:endParaRPr>
           </a:p>
         </p:txBody>
       </p:sp>
@@ -6373,14 +6443,6 @@
   <p:clrMapOvr>
     <a:masterClrMapping/>
   </p:clrMapOvr>
-  <mc:AlternateContent xmlns:mc="http://schemas.openxmlformats.org/markup-compatibility/2006" xmlns:p14="http://schemas.microsoft.com/office/powerpoint/2010/main">
-    <mc:Choice Requires="p14">
-      <p:transition spd="slow" p14:dur="2000"/>
-    </mc:Choice>
-    <mc:Fallback xmlns="" xmlns:p15="http://schemas.microsoft.com/office/powerpoint/2012/main">
-      <p:transition spd="slow"/>
-    </mc:Fallback>
-  </mc:AlternateContent>
 </p:sld>
 </file>
 
@@ -6519,7 +6581,7 @@
           <a:noFill/>
         </p:spPr>
         <p:txBody>
-          <a:bodyPr wrap="square" lIns="36576" rIns="36576" tIns="18288" bIns="18288">
+          <a:bodyPr wrap="square" lIns="36576" tIns="18288" rIns="36576" bIns="18288">
             <a:spAutoFit/>
           </a:bodyPr>
           <a:lstStyle/>
@@ -6574,7 +6636,7 @@
           </a:fontRef>
         </p:style>
         <p:txBody>
-          <a:bodyPr rtlCol="0" anchor="ctr" wrap="square" lIns="146304" rIns="109728" tIns="91440" bIns="64008"/>
+          <a:bodyPr wrap="square" lIns="146304" tIns="91440" rIns="109728" bIns="64008" rtlCol="0" anchor="ctr"/>
           <a:lstStyle/>
           <a:p>
             <a:pPr algn="ctr">
@@ -6746,7 +6808,7 @@
           </a:fontRef>
         </p:style>
         <p:txBody>
-          <a:bodyPr rtlCol="0" anchor="ctr" wrap="square" lIns="109728" rIns="73152" tIns="73152" bIns="36576"/>
+          <a:bodyPr wrap="square" lIns="109728" tIns="73152" rIns="73152" bIns="36576" rtlCol="0" anchor="ctr"/>
           <a:lstStyle/>
           <a:p>
             <a:pPr algn="ctr"/>
@@ -6864,7 +6926,7 @@
           </a:fontRef>
         </p:style>
         <p:txBody>
-          <a:bodyPr rtlCol="0" anchor="ctr" wrap="square" lIns="109728" rIns="73152" tIns="73152" bIns="36576"/>
+          <a:bodyPr wrap="square" lIns="109728" tIns="73152" rIns="73152" bIns="36576" rtlCol="0" anchor="ctr"/>
           <a:lstStyle/>
           <a:p>
             <a:pPr algn="ctr"/>
@@ -6945,7 +7007,7 @@
           <a:noFill/>
         </p:spPr>
         <p:txBody>
-          <a:bodyPr wrap="square" lIns="36576" rIns="36576" tIns="18288" bIns="18288">
+          <a:bodyPr wrap="square" lIns="36576" tIns="18288" rIns="36576" bIns="18288">
             <a:spAutoFit/>
           </a:bodyPr>
           <a:lstStyle/>
@@ -6967,14 +7029,6 @@
   <p:clrMapOvr>
     <a:masterClrMapping/>
   </p:clrMapOvr>
-  <mc:AlternateContent xmlns:mc="http://schemas.openxmlformats.org/markup-compatibility/2006" xmlns:p14="http://schemas.microsoft.com/office/powerpoint/2010/main">
-    <mc:Choice Requires="p14">
-      <p:transition spd="slow" p14:dur="2000"/>
-    </mc:Choice>
-    <mc:Fallback xmlns="" xmlns:p15="http://schemas.microsoft.com/office/powerpoint/2012/main">
-      <p:transition spd="slow"/>
-    </mc:Fallback>
-  </mc:AlternateContent>
 </p:sld>
 </file>
 
@@ -7305,10 +7359,6 @@
               </a:rPr>
               <a:t>AG News</a:t>
             </a:r>
-            <a:r>
-              <a:rPr dirty="0"/>
-              <a:t/>
-            </a:r>
             <a:br>
               <a:rPr dirty="0"/>
             </a:br>
@@ -7404,7 +7454,7 @@
               </a:lnSpc>
             </a:pPr>
             <a:r>
-              <a:rPr lang="uk-UA" sz="1300" dirty="0" smtClean="0">
+              <a:rPr lang="uk-UA" sz="1300" dirty="0">
                 <a:solidFill>
                   <a:srgbClr val="000000"/>
                 </a:solidFill>
@@ -7413,17 +7463,13 @@
               <a:t>О</a:t>
             </a:r>
             <a:r>
-              <a:rPr sz="1300" dirty="0" err="1" smtClean="0">
+              <a:rPr sz="1300" dirty="0" err="1">
                 <a:solidFill>
                   <a:srgbClr val="000000"/>
                 </a:solidFill>
                 <a:latin typeface="Arial"/>
               </a:rPr>
               <a:t>чищення</a:t>
-            </a:r>
-            <a:r>
-              <a:rPr dirty="0"/>
-              <a:t/>
             </a:r>
             <a:br>
               <a:rPr dirty="0"/>
@@ -7438,7 +7484,7 @@
               <a:t>Т</a:t>
             </a:r>
             <a:r>
-              <a:rPr sz="1300" dirty="0" err="1" smtClean="0">
+              <a:rPr sz="1300" dirty="0" err="1">
                 <a:solidFill>
                   <a:srgbClr val="000000"/>
                 </a:solidFill>
@@ -7520,38 +7566,25 @@
               </a:lnSpc>
             </a:pPr>
             <a:r>
-              <a:rPr sz="1300" dirty="0" smtClean="0">
+              <a:rPr sz="1300" dirty="0">
                 <a:solidFill>
                   <a:srgbClr val="000000"/>
                 </a:solidFill>
                 <a:latin typeface="Arial"/>
               </a:rPr>
               <a:t>LSTM</a:t>
-            </a:r>
-            <a:r>
-              <a:rPr dirty="0"/>
-              <a:t/>
             </a:r>
             <a:br>
               <a:rPr dirty="0"/>
             </a:br>
             <a:r>
-              <a:rPr sz="1300" dirty="0" smtClean="0">
-                <a:solidFill>
-                  <a:srgbClr val="000000"/>
-                </a:solidFill>
-                <a:latin typeface="Arial"/>
-              </a:rPr>
-              <a:t> </a:t>
-            </a:r>
-            <a:r>
               <a:rPr sz="1300" dirty="0">
                 <a:solidFill>
                   <a:srgbClr val="000000"/>
                 </a:solidFill>
                 <a:latin typeface="Arial"/>
               </a:rPr>
-              <a:t>Transformer</a:t>
+              <a:t> Transformer</a:t>
             </a:r>
           </a:p>
         </p:txBody>
@@ -7629,10 +7662,6 @@
               </a:rPr>
               <a:t>F1, Accuracy</a:t>
             </a:r>
-            <a:r>
-              <a:rPr dirty="0"/>
-              <a:t/>
-            </a:r>
             <a:br>
               <a:rPr dirty="0"/>
             </a:br>
@@ -7715,7 +7744,7 @@
           <a:p>
             <a:pPr algn="ctr"/>
             <a:r>
-              <a:rPr sz="1500" b="1" dirty="0" err="1" smtClean="0">
+              <a:rPr sz="1500" b="1" dirty="0" err="1">
                 <a:solidFill>
                   <a:srgbClr val="005D78"/>
                 </a:solidFill>
@@ -7760,7 +7789,7 @@
               </a:lnSpc>
             </a:pPr>
             <a:r>
-              <a:rPr lang="uk-UA" sz="1700" b="0" noProof="1" smtClean="0">
+              <a:rPr lang="uk-UA" sz="1700" b="0" noProof="1">
                 <a:solidFill>
                   <a:srgbClr val="000000"/>
                 </a:solidFill>
@@ -7768,12 +7797,6 @@
               </a:rPr>
               <a:t>однаковий датасет, однаковий поділ на train / valid / test, однаковий набір метрик і однакова логіка збереження результатів.</a:t>
             </a:r>
-            <a:endParaRPr lang="uk-UA" sz="1700" b="0" noProof="1">
-              <a:solidFill>
-                <a:srgbClr val="000000"/>
-              </a:solidFill>
-              <a:latin typeface="Arial"/>
-            </a:endParaRPr>
           </a:p>
         </p:txBody>
       </p:sp>
@@ -7782,14 +7805,6 @@
   <p:clrMapOvr>
     <a:masterClrMapping/>
   </p:clrMapOvr>
-  <mc:AlternateContent xmlns:mc="http://schemas.openxmlformats.org/markup-compatibility/2006" xmlns:p14="http://schemas.microsoft.com/office/powerpoint/2010/main">
-    <mc:Choice Requires="p14">
-      <p:transition spd="slow" p14:dur="2000"/>
-    </mc:Choice>
-    <mc:Fallback xmlns="" xmlns:p15="http://schemas.microsoft.com/office/powerpoint/2012/main">
-      <p:transition spd="slow"/>
-    </mc:Fallback>
-  </mc:AlternateContent>
 </p:sld>
 </file>
 
@@ -8188,9 +8203,6 @@
               </a:rPr>
               <a:t>єдина функція підготовки тексту</a:t>
             </a:r>
-            <a:r>
-              <a:t/>
-            </a:r>
             <a:br/>
             <a:r>
               <a:rPr sz="1300">
@@ -8201,9 +8213,6 @@
               </a:rPr>
               <a:t>окремий запуск кожної моделі</a:t>
             </a:r>
-            <a:r>
-              <a:t/>
-            </a:r>
             <a:br/>
             <a:r>
               <a:rPr sz="1300">
@@ -8213,9 +8222,6 @@
                 <a:latin typeface="Arial"/>
               </a:rPr>
               <a:t>збереження результатів після навчання</a:t>
-            </a:r>
-            <a:r>
-              <a:t/>
             </a:r>
             <a:br/>
             <a:r>
@@ -8305,14 +8311,6 @@
   <p:clrMapOvr>
     <a:masterClrMapping/>
   </p:clrMapOvr>
-  <mc:AlternateContent xmlns:mc="http://schemas.openxmlformats.org/markup-compatibility/2006" xmlns:p14="http://schemas.microsoft.com/office/powerpoint/2010/main">
-    <mc:Choice Requires="p14">
-      <p:transition spd="slow" p14:dur="2000"/>
-    </mc:Choice>
-    <mc:Fallback xmlns="" xmlns:p15="http://schemas.microsoft.com/office/powerpoint/2012/main">
-      <p:transition spd="slow"/>
-    </mc:Fallback>
-  </mc:AlternateContent>
 </p:sld>
 </file>
 
@@ -8507,10 +8505,6 @@
               </a:rPr>
               <a:t>AG News</a:t>
             </a:r>
-            <a:r>
-              <a:rPr dirty="0"/>
-              <a:t/>
-            </a:r>
             <a:br>
               <a:rPr dirty="0"/>
             </a:br>
@@ -8611,9 +8605,6 @@
               </a:rPr>
               <a:t>Validation F1</a:t>
             </a:r>
-            <a:r>
-              <a:t/>
-            </a:r>
             <a:br/>
             <a:r>
               <a:rPr sz="1300">
@@ -8624,9 +8615,6 @@
               </a:rPr>
               <a:t>Test F1</a:t>
             </a:r>
-            <a:r>
-              <a:t/>
-            </a:r>
             <a:br/>
             <a:r>
               <a:rPr sz="1300">
@@ -8637,9 +8625,6 @@
               </a:rPr>
               <a:t>Accuracy</a:t>
             </a:r>
-            <a:r>
-              <a:t/>
-            </a:r>
             <a:br/>
             <a:r>
               <a:rPr sz="1300">
@@ -8649,9 +8634,6 @@
                 <a:latin typeface="Arial"/>
               </a:rPr>
               <a:t>Training time</a:t>
-            </a:r>
-            <a:r>
-              <a:t/>
             </a:r>
             <a:br/>
             <a:r>
@@ -9372,14 +9354,6 @@
   <p:clrMapOvr>
     <a:masterClrMapping/>
   </p:clrMapOvr>
-  <mc:AlternateContent xmlns:mc="http://schemas.openxmlformats.org/markup-compatibility/2006" xmlns:p14="http://schemas.microsoft.com/office/powerpoint/2010/main">
-    <mc:Choice Requires="p14">
-      <p:transition spd="slow" p14:dur="2000"/>
-    </mc:Choice>
-    <mc:Fallback xmlns="" xmlns:p15="http://schemas.microsoft.com/office/powerpoint/2012/main">
-      <p:transition spd="slow"/>
-    </mc:Fallback>
-  </mc:AlternateContent>
 </p:sld>
 </file>
 
@@ -10686,14 +10660,6 @@
   <p:clrMapOvr>
     <a:masterClrMapping/>
   </p:clrMapOvr>
-  <mc:AlternateContent xmlns:mc="http://schemas.openxmlformats.org/markup-compatibility/2006" xmlns:p14="http://schemas.microsoft.com/office/powerpoint/2010/main">
-    <mc:Choice Requires="p14">
-      <p:transition spd="slow" p14:dur="2000"/>
-    </mc:Choice>
-    <mc:Fallback xmlns="" xmlns:p15="http://schemas.microsoft.com/office/powerpoint/2012/main">
-      <p:transition spd="slow"/>
-    </mc:Fallback>
-  </mc:AlternateContent>
 </p:sld>
 </file>
 
@@ -10858,7 +10824,7 @@
           <a:p>
             <a:pPr algn="ctr"/>
             <a:r>
-              <a:rPr lang="uk-UA" sz="1600" b="1" noProof="1" smtClean="0">
+              <a:rPr lang="uk-UA" sz="1600" b="1" noProof="1">
                 <a:solidFill>
                   <a:srgbClr val="005D78"/>
                 </a:solidFill>
@@ -10874,7 +10840,7 @@
               </a:lnSpc>
             </a:pPr>
             <a:r>
-              <a:rPr lang="uk-UA" sz="1500" noProof="1" smtClean="0">
+              <a:rPr lang="uk-UA" sz="1500" noProof="1">
                 <a:solidFill>
                   <a:srgbClr val="000000"/>
                 </a:solidFill>
@@ -10882,12 +10848,6 @@
               </a:rPr>
               <a:t>У цьому експерименті LSTM-група показала стабільніші результати за F1, а BiLSTM-Base стала найкращою моделлю.</a:t>
             </a:r>
-            <a:endParaRPr lang="uk-UA" sz="1500" noProof="1">
-              <a:solidFill>
-                <a:srgbClr val="000000"/>
-              </a:solidFill>
-              <a:latin typeface="Arial"/>
-            </a:endParaRPr>
           </a:p>
         </p:txBody>
       </p:sp>
@@ -10926,14 +10886,6 @@
   <p:clrMapOvr>
     <a:masterClrMapping/>
   </p:clrMapOvr>
-  <mc:AlternateContent xmlns:mc="http://schemas.openxmlformats.org/markup-compatibility/2006" xmlns:p14="http://schemas.microsoft.com/office/powerpoint/2010/main">
-    <mc:Choice Requires="p14">
-      <p:transition spd="slow" p14:dur="2000"/>
-    </mc:Choice>
-    <mc:Fallback xmlns="" xmlns:p15="http://schemas.microsoft.com/office/powerpoint/2012/main">
-      <p:transition spd="slow"/>
-    </mc:Fallback>
-  </mc:AlternateContent>
 </p:sld>
 </file>
 
